--- a/artifacts/speaking-portfolio-expanded/decks/judgment-15min-screen.pptx
+++ b/artifacts/speaking-portfolio-expanded/decks/judgment-15min-screen.pptx
@@ -856,7 +856,7 @@
                 <a:ea typeface="Arial"/>
                 <a:cs typeface="Arial"/>
               </a:rPr>
-              <a:t xml:space="preserve">Little's law gives a separate accounting identity for a stable system: average work in progress equals throughput times average time in the system. Neither result says your team is literally one server. They tell us what to measure before claiming the reviewer just needs to try harder.</a:t>
+              <a:t xml:space="preserve">Little's law gives a separate accounting identity for a stable system: average work in progress equals throughput times average time in the system. They tell us what to measure before claiming the reviewer just needs to try harder.</a:t>
             </a:r>
             <a:endParaRPr lang="en-US" sz="1200"/>
           </a:p>
@@ -1040,7 +1040,7 @@
                 <a:ea typeface="Arial"/>
                 <a:cs typeface="Arial"/>
               </a:rPr>
-              <a:t xml:space="preserve">Bridge: improve the process producing the queue. Start with the request before the code exists.</a:t>
+              <a:t xml:space="preserve">Bridge: improve the process producing the queue. Start with the request before the code exists. Thirty seconds in pairs: what does the ticket leave unanswered?</a:t>
             </a:r>
             <a:endParaRPr lang="en-US" sz="1200"/>
           </a:p>
@@ -1383,52 +1383,6 @@
                 <a:ea typeface="Arial"/>
                 <a:cs typeface="Arial"/>
               </a:rPr>
-              <a:t xml:space="preserve">Spend sixty seconds with the person next to you. Write the questions you need answered before implementing it. You do not get a second page of requirements; that is the point.</a:t>
-            </a:r>
-            <a:endParaRPr lang="en-US" sz="1200"/>
-          </a:p>
-          <a:p>
-            <a:pPr marL="0" indent="0">
-              <a:lnSpc>
-                <a:spcPts val="1560"/>
-              </a:lnSpc>
-              <a:spcAft>
-                <a:spcPts val="0"/>
-              </a:spcAft>
-              <a:buNone/>
-            </a:pPr>
-            <a:r>
-              <a:rPr lang="en-US" sz="1200" b="0">
-                <a:solidFill>
-                  <a:srgbClr val="202b33"/>
-                </a:solidFill>
-                <a:latin typeface="Arial"/>
-                <a:ea typeface="Arial"/>
-                <a:cs typeface="Arial"/>
-              </a:rPr>
-              <a:t xml:space="preserve"/>
-            </a:r>
-            <a:endParaRPr lang="en-US" sz="1200"/>
-          </a:p>
-          <a:p>
-            <a:pPr marL="0" indent="0">
-              <a:lnSpc>
-                <a:spcPts val="1560"/>
-              </a:lnSpc>
-              <a:spcAft>
-                <a:spcPts val="0"/>
-              </a:spcAft>
-              <a:buNone/>
-            </a:pPr>
-            <a:r>
-              <a:rPr lang="en-US" sz="1200" b="0">
-                <a:solidFill>
-                  <a:srgbClr val="202b33"/>
-                </a:solidFill>
-                <a:latin typeface="Arial"/>
-                <a:ea typeface="Arial"/>
-                <a:cs typeface="Arial"/>
-              </a:rPr>
               <a:t xml:space="preserve">Who can grant a role? Does it apply to one tenant or every tenant? What happens to an existing session after revocation? What does the audit record need to show? There are several plausible implementations, and most disagree about behavior the ticket never specified.</a:t>
             </a:r>
             <a:endParaRPr lang="en-US" sz="1200"/>
@@ -1567,7 +1521,7 @@
                 <a:ea typeface="Arial"/>
                 <a:cs typeface="Arial"/>
               </a:rPr>
-              <a:t xml:space="preserve">Read the request once. Give pairs a full 60 seconds, collect two answers, then introduce the tenant and revocation questions.</a:t>
+              <a:t xml:space="preserve">Read the request once. Give pairs sixty seconds here, thirty in the 15-minute cut. Collect two answers, then introduce the tenant and revocation questions.</a:t>
             </a:r>
             <a:endParaRPr lang="en-US" sz="1200"/>
           </a:p>
@@ -2002,7 +1956,7 @@
                 <a:ea typeface="Arial"/>
                 <a:cs typeface="Arial"/>
               </a:rPr>
-              <a:t xml:space="preserve">Tie this back to the curve. Clear boundaries reduce the number of interpretations arriving at review. Bounded diffs reduce the amount of code a reviewer has to reconstruct at once. That is an attempt to reduce service-time variance, not a claim that a document automatically changes a coefficient.</a:t>
+              <a:t xml:space="preserve">Tie this back to the curve. Clear boundaries reduce the number of interpretations arriving at review. Bounded diffs reduce the amount of code a reviewer has to reconstruct at once. That is the variance term. On purpose.</a:t>
             </a:r>
             <a:endParaRPr lang="en-US" sz="1200"/>
           </a:p>
@@ -2299,7 +2253,7 @@
                 <a:ea typeface="Arial"/>
                 <a:cs typeface="Arial"/>
               </a:rPr>
-              <a:t xml:space="preserve">canEdit(user) = user.roles.includes("admin")</a:t>
+              <a:t xml:space="preserve">canEdit(user, resourceTenant) = user.roles.includes("admin")</a:t>
             </a:r>
             <a:endParaRPr lang="en-US" sz="1200"/>
           </a:p>
@@ -2483,6 +2437,52 @@
                 <a:ea typeface="Arial"/>
                 <a:cs typeface="Arial"/>
               </a:rPr>
+              <a:t xml:space="preserve">The resource tenant is right there in the signature. Nothing reads it. And you already heard the cross-tenant case, back on the spec slide. Watch the vote anyway.</a:t>
+            </a:r>
+            <a:endParaRPr lang="en-US" sz="1200"/>
+          </a:p>
+          <a:p>
+            <a:pPr marL="0" indent="0">
+              <a:lnSpc>
+                <a:spcPts val="1560"/>
+              </a:lnSpc>
+              <a:spcAft>
+                <a:spcPts val="0"/>
+              </a:spcAft>
+              <a:buNone/>
+            </a:pPr>
+            <a:r>
+              <a:rPr lang="en-US" sz="1200" b="0">
+                <a:solidFill>
+                  <a:srgbClr val="202b33"/>
+                </a:solidFill>
+                <a:latin typeface="Arial"/>
+                <a:ea typeface="Arial"/>
+                <a:cs typeface="Arial"/>
+              </a:rPr>
+              <a:t xml:space="preserve"/>
+            </a:r>
+            <a:endParaRPr lang="en-US" sz="1200"/>
+          </a:p>
+          <a:p>
+            <a:pPr marL="0" indent="0">
+              <a:lnSpc>
+                <a:spcPts val="1560"/>
+              </a:lnSpc>
+              <a:spcAft>
+                <a:spcPts val="0"/>
+              </a:spcAft>
+              <a:buNone/>
+            </a:pPr>
+            <a:r>
+              <a:rPr lang="en-US" sz="1200" b="0">
+                <a:solidFill>
+                  <a:srgbClr val="202b33"/>
+                </a:solidFill>
+                <a:latin typeface="Arial"/>
+                <a:ea typeface="Arial"/>
+                <a:cs typeface="Arial"/>
+              </a:rPr>
               <a:t xml:space="preserve">Would you approve it? Now run the case where that administrator belongs to tenant A and the resource belongs to tenant B. The test was accurate about the behavior it checked. The behavior was incomplete in exactly the same way as the implementation.</a:t>
             </a:r>
             <a:endParaRPr lang="en-US" sz="1200"/>
@@ -2575,53 +2575,53 @@
                 <a:ea typeface="Arial"/>
                 <a:cs typeface="Arial"/>
               </a:rPr>
-              <a:t xml:space="preserve">Bainbridge asks what automation leaves the operator doing. Automation-bias experiments ask what happens when people defer to a decision aid despite other evidence. Those experiments were not code-review trials. This fixture is how the concern shows up in our queue: the green signal gets attention that the missing case did not.</a:t>
-            </a:r>
-            <a:endParaRPr lang="en-US" sz="1200"/>
-          </a:p>
-          <a:p>
-            <a:pPr marL="0" indent="0">
-              <a:lnSpc>
-                <a:spcPts val="1560"/>
-              </a:lnSpc>
-              <a:spcAft>
-                <a:spcPts val="0"/>
-              </a:spcAft>
-              <a:buNone/>
-            </a:pPr>
-            <a:r>
-              <a:rPr lang="en-US" sz="1200" b="0">
-                <a:solidFill>
-                  <a:srgbClr val="202b33"/>
-                </a:solidFill>
-                <a:latin typeface="Arial"/>
-                <a:ea typeface="Arial"/>
-                <a:cs typeface="Arial"/>
-              </a:rPr>
-              <a:t xml:space="preserve"/>
-            </a:r>
-            <a:endParaRPr lang="en-US" sz="1200"/>
-          </a:p>
-          <a:p>
-            <a:pPr marL="0" indent="0">
-              <a:lnSpc>
-                <a:spcPts val="1560"/>
-              </a:lnSpc>
-              <a:spcAft>
-                <a:spcPts val="0"/>
-              </a:spcAft>
-              <a:buNone/>
-            </a:pPr>
-            <a:r>
-              <a:rPr lang="en-US" sz="1200" b="0">
-                <a:solidFill>
-                  <a:srgbClr val="202b33"/>
-                </a:solidFill>
-                <a:latin typeface="Arial"/>
-                <a:ea typeface="Arial"/>
-                <a:cs typeface="Arial"/>
-              </a:rPr>
-              <a:t xml:space="preserve">Bainbridge (1983), [Ironies of automation](https://www.sciencedirect.com/science/article/pii/0005109883900468). Mosier and Skitka (1999), [Automation Use and Automation Bias](https://journals.sagepub.com/doi/10.1177/154193129904300346).</a:t>
+              <a:t xml:space="preserve">Bainbridge asks what automation leaves the operator doing. Skitka and colleagues put people in a flight simulator with an automated monitoring aid and counted the trials where the aid was wrong. On those trials people missed events the aid did not flag, and acted on prompts the other instruments contradicted. That is the whole finding, and it is about the trials where the aid was wrong. This fixture is how the same concern shows up in our queue: the green signal gets attention that the missing case did not.</a:t>
+            </a:r>
+            <a:endParaRPr lang="en-US" sz="1200"/>
+          </a:p>
+          <a:p>
+            <a:pPr marL="0" indent="0">
+              <a:lnSpc>
+                <a:spcPts val="1560"/>
+              </a:lnSpc>
+              <a:spcAft>
+                <a:spcPts val="0"/>
+              </a:spcAft>
+              <a:buNone/>
+            </a:pPr>
+            <a:r>
+              <a:rPr lang="en-US" sz="1200" b="0">
+                <a:solidFill>
+                  <a:srgbClr val="202b33"/>
+                </a:solidFill>
+                <a:latin typeface="Arial"/>
+                <a:ea typeface="Arial"/>
+                <a:cs typeface="Arial"/>
+              </a:rPr>
+              <a:t xml:space="preserve"/>
+            </a:r>
+            <a:endParaRPr lang="en-US" sz="1200"/>
+          </a:p>
+          <a:p>
+            <a:pPr marL="0" indent="0">
+              <a:lnSpc>
+                <a:spcPts val="1560"/>
+              </a:lnSpc>
+              <a:spcAft>
+                <a:spcPts val="0"/>
+              </a:spcAft>
+              <a:buNone/>
+            </a:pPr>
+            <a:r>
+              <a:rPr lang="en-US" sz="1200" b="0">
+                <a:solidFill>
+                  <a:srgbClr val="202b33"/>
+                </a:solidFill>
+                <a:latin typeface="Arial"/>
+                <a:ea typeface="Arial"/>
+                <a:cs typeface="Arial"/>
+              </a:rPr>
+              <a:t xml:space="preserve">Lisanne Bainbridge (1983), [Ironies of automation](https://www.sciencedirect.com/science/article/pii/0005109883900468), Automatica 19(6), 775–779. Linda J. Skitka, Kathleen L. Mosier and Mark Burdick (1999), [Does automation bias decision-making?](https://doi.org/10.1006/ijhc.1999.0252), International Journal of Human-Computer Studies 51(5), 991–1006. A flight-simulation task with a monitoring aid, not a code-review trial.</a:t>
             </a:r>
             <a:endParaRPr lang="en-US" sz="1200"/>
           </a:p>
@@ -3056,7 +3056,7 @@
                 <a:ea typeface="Arial"/>
                 <a:cs typeface="Arial"/>
               </a:rPr>
-              <a:t xml:space="preserve">Fewer arrivals means deciding which changes should exist. It includes declining a second implementation after the first already met the need. Comparing fleets of candidate agents belongs to Dynamic Scaling. Here we are protecting the person who accepts the resulting work.</a:t>
+              <a:t xml:space="preserve">Fewer arrivals means deciding which changes should exist, including declining a second implementation after the first already met the need. That is a rule about review load, not about generation: generate ten parallel attempts if you like, as long as a gate collapses them to one candidate before a human reads any of them. Judging the ten is Dynamic Scaling's talk, and its Council of Guards eats nine. This one protects the person who accepts the one that got through.</a:t>
             </a:r>
             <a:endParaRPr lang="en-US" sz="1200"/>
           </a:p>
@@ -3583,7 +3583,7 @@
                 <a:ea typeface="Arial"/>
                 <a:cs typeface="Arial"/>
               </a:rPr>
-              <a:t xml:space="preserve">Ninety-five percent gives a nineteen-times wait in our model. We can argue about the model by measuring arrivals, service time, and variability. We cannot argue the queue away by pointing at how quickly the code appeared.</a:t>
+              <a:t xml:space="preserve">Ninety-five percent utilization is not efficiency. It is a nineteen-times wait with good posture. Argue with the model by measuring arrivals, service time, and variability. You cannot argue the queue away by pointing at how quickly the code appeared.</a:t>
             </a:r>
             <a:endParaRPr lang="en-US" sz="1200"/>
           </a:p>
@@ -4409,7 +4409,7 @@
       </p:sp>
       <p:pic>
         <p:nvPicPr>
-          <p:cNvPr id="5" name="8de9aa7b0e58010a491d155d2a0aaafbe5d48c9d4da5759fad5af686b3fce993" descr="A queue does not care how you feel about it"/>
+          <p:cNvPr id="5" name="8de9aa7b0e58010a491d155d2a0aaafbe5d48c9d4da5759fad5af686b3fce993" descr="Kingman: queue wait vs reviewer utilization, variability factor one"/>
           <p:cNvPicPr>
             <a:picLocks noChangeAspect="1"/>
           </p:cNvPicPr>
@@ -5773,6 +5773,127 @@
         <p:spPr>
           <a:xfrm>
             <a:off x="2000250" y="2771775"/>
+            <a:ext cx="11029950" cy="1059180"/>
+          </a:xfrm>
+          <a:prstGeom prst="rect">
+            <a:avLst/>
+          </a:prstGeom>
+          <a:noFill/>
+          <a:ln>
+            <a:noFill/>
+          </a:ln>
+        </p:spPr>
+        <p:txBody>
+          <a:bodyPr wrap="none" lIns="0" tIns="0" rIns="0" bIns="0" anchor="t">
+            <a:noAutofit/>
+          </a:bodyPr>
+          <a:lstStyle/>
+          <a:p>
+            <a:pPr marL="0" indent="0">
+              <a:lnSpc>
+                <a:spcPts val="4095"/>
+              </a:lnSpc>
+              <a:spcAft>
+                <a:spcPts val="0"/>
+              </a:spcAft>
+              <a:buNone/>
+            </a:pPr>
+            <a:r>
+              <a:rPr lang="en-US" sz="3150" b="0">
+                <a:solidFill>
+                  <a:srgbClr val="F5F1E9"/>
+                </a:solidFill>
+                <a:latin typeface="Arial"/>
+                <a:ea typeface="Arial"/>
+                <a:cs typeface="Arial"/>
+              </a:rPr>
+              <a:t xml:space="preserve">canEdit(user, resourceTenant) =</a:t>
+            </a:r>
+            <a:endParaRPr lang="en-US" sz="3150"/>
+          </a:p>
+          <a:p>
+            <a:pPr marL="0" indent="0">
+              <a:lnSpc>
+                <a:spcPts val="4095"/>
+              </a:lnSpc>
+              <a:spcAft>
+                <a:spcPts val="0"/>
+              </a:spcAft>
+              <a:buNone/>
+            </a:pPr>
+            <a:r>
+              <a:rPr lang="en-US" sz="3150" b="0">
+                <a:solidFill>
+                  <a:srgbClr val="F5F1E9"/>
+                </a:solidFill>
+                <a:latin typeface="Arial"/>
+                <a:ea typeface="Arial"/>
+                <a:cs typeface="Arial"/>
+              </a:rPr>
+              <a:t xml:space="preserve">user.roles.includes("admin")</a:t>
+            </a:r>
+            <a:endParaRPr lang="en-US" sz="3150"/>
+          </a:p>
+        </p:txBody>
+      </p:sp>
+      <p:sp>
+        <p:nvSpPr>
+          <p:cNvPr id="6" name="Text 6"/>
+          <p:cNvSpPr txBox="1"/>
+          <p:nvPr/>
+        </p:nvSpPr>
+        <p:spPr>
+          <a:xfrm>
+            <a:off x="685800" y="4078605"/>
+            <a:ext cx="904875" cy="476250"/>
+          </a:xfrm>
+          <a:prstGeom prst="rect">
+            <a:avLst/>
+          </a:prstGeom>
+          <a:noFill/>
+          <a:ln>
+            <a:noFill/>
+          </a:ln>
+        </p:spPr>
+        <p:txBody>
+          <a:bodyPr wrap="none" lIns="0" tIns="0" rIns="0" bIns="0" anchor="t">
+            <a:noAutofit/>
+          </a:bodyPr>
+          <a:lstStyle/>
+          <a:p>
+            <a:pPr marL="0" indent="0">
+              <a:lnSpc>
+                <a:spcPts val="2438"/>
+              </a:lnSpc>
+              <a:spcAft>
+                <a:spcPts val="0"/>
+              </a:spcAft>
+              <a:buNone/>
+            </a:pPr>
+            <a:r>
+              <a:rPr lang="en-US" sz="1875" b="0">
+                <a:solidFill>
+                  <a:srgbClr val="EFB45F"/>
+                </a:solidFill>
+                <a:latin typeface="Arial"/>
+                <a:ea typeface="Arial"/>
+                <a:cs typeface="Arial"/>
+              </a:rPr>
+              <a:t xml:space="preserve">02</a:t>
+            </a:r>
+            <a:endParaRPr lang="en-US" sz="1875"/>
+          </a:p>
+        </p:txBody>
+      </p:sp>
+      <p:sp>
+        <p:nvSpPr>
+          <p:cNvPr id="7" name="Text 7"/>
+          <p:cNvSpPr txBox="1"/>
+          <p:nvPr/>
+        </p:nvSpPr>
+        <p:spPr>
+          <a:xfrm>
+            <a:off x="2000250" y="4078605"/>
             <a:ext cx="11029950" cy="539115"/>
           </a:xfrm>
           <a:prstGeom prst="rect">
@@ -5807,7 +5928,7 @@
                 <a:ea typeface="Arial"/>
                 <a:cs typeface="Arial"/>
               </a:rPr>
-              <a:t xml:space="preserve">canEdit(user) = user.roles.includes("admin")</a:t>
+              <a:t xml:space="preserve">Test: admin user → allowed</a:t>
             </a:r>
             <a:endParaRPr lang="en-US" sz="3150"/>
           </a:p>
@@ -5815,13 +5936,13 @@
       </p:sp>
       <p:sp>
         <p:nvSpPr>
-          <p:cNvPr id="6" name="Text 6"/>
+          <p:cNvPr id="8" name="Text 8"/>
           <p:cNvSpPr txBox="1"/>
           <p:nvPr/>
         </p:nvSpPr>
         <p:spPr>
           <a:xfrm>
-            <a:off x="685800" y="3558540"/>
+            <a:off x="685800" y="4865370"/>
             <a:ext cx="904875" cy="476250"/>
           </a:xfrm>
           <a:prstGeom prst="rect">
@@ -5856,104 +5977,6 @@
                 <a:ea typeface="Arial"/>
                 <a:cs typeface="Arial"/>
               </a:rPr>
-              <a:t xml:space="preserve">02</a:t>
-            </a:r>
-            <a:endParaRPr lang="en-US" sz="1875"/>
-          </a:p>
-        </p:txBody>
-      </p:sp>
-      <p:sp>
-        <p:nvSpPr>
-          <p:cNvPr id="7" name="Text 7"/>
-          <p:cNvSpPr txBox="1"/>
-          <p:nvPr/>
-        </p:nvSpPr>
-        <p:spPr>
-          <a:xfrm>
-            <a:off x="2000250" y="3558540"/>
-            <a:ext cx="11029950" cy="539115"/>
-          </a:xfrm>
-          <a:prstGeom prst="rect">
-            <a:avLst/>
-          </a:prstGeom>
-          <a:noFill/>
-          <a:ln>
-            <a:noFill/>
-          </a:ln>
-        </p:spPr>
-        <p:txBody>
-          <a:bodyPr wrap="none" lIns="0" tIns="0" rIns="0" bIns="0" anchor="t">
-            <a:noAutofit/>
-          </a:bodyPr>
-          <a:lstStyle/>
-          <a:p>
-            <a:pPr marL="0" indent="0">
-              <a:lnSpc>
-                <a:spcPts val="4095"/>
-              </a:lnSpc>
-              <a:spcAft>
-                <a:spcPts val="0"/>
-              </a:spcAft>
-              <a:buNone/>
-            </a:pPr>
-            <a:r>
-              <a:rPr lang="en-US" sz="3150" b="0">
-                <a:solidFill>
-                  <a:srgbClr val="F5F1E9"/>
-                </a:solidFill>
-                <a:latin typeface="Arial"/>
-                <a:ea typeface="Arial"/>
-                <a:cs typeface="Arial"/>
-              </a:rPr>
-              <a:t xml:space="preserve">Test: admin user → allowed</a:t>
-            </a:r>
-            <a:endParaRPr lang="en-US" sz="3150"/>
-          </a:p>
-        </p:txBody>
-      </p:sp>
-      <p:sp>
-        <p:nvSpPr>
-          <p:cNvPr id="8" name="Text 8"/>
-          <p:cNvSpPr txBox="1"/>
-          <p:nvPr/>
-        </p:nvSpPr>
-        <p:spPr>
-          <a:xfrm>
-            <a:off x="685800" y="4345305"/>
-            <a:ext cx="904875" cy="476250"/>
-          </a:xfrm>
-          <a:prstGeom prst="rect">
-            <a:avLst/>
-          </a:prstGeom>
-          <a:noFill/>
-          <a:ln>
-            <a:noFill/>
-          </a:ln>
-        </p:spPr>
-        <p:txBody>
-          <a:bodyPr wrap="none" lIns="0" tIns="0" rIns="0" bIns="0" anchor="t">
-            <a:noAutofit/>
-          </a:bodyPr>
-          <a:lstStyle/>
-          <a:p>
-            <a:pPr marL="0" indent="0">
-              <a:lnSpc>
-                <a:spcPts val="2438"/>
-              </a:lnSpc>
-              <a:spcAft>
-                <a:spcPts val="0"/>
-              </a:spcAft>
-              <a:buNone/>
-            </a:pPr>
-            <a:r>
-              <a:rPr lang="en-US" sz="1875" b="0">
-                <a:solidFill>
-                  <a:srgbClr val="EFB45F"/>
-                </a:solidFill>
-                <a:latin typeface="Arial"/>
-                <a:ea typeface="Arial"/>
-                <a:cs typeface="Arial"/>
-              </a:rPr>
               <a:t xml:space="preserve">03</a:t>
             </a:r>
             <a:endParaRPr lang="en-US" sz="1875"/>
@@ -5968,7 +5991,7 @@
         </p:nvSpPr>
         <p:spPr>
           <a:xfrm>
-            <a:off x="2000250" y="4345305"/>
+            <a:off x="2000250" y="4865370"/>
             <a:ext cx="11029950" cy="539115"/>
           </a:xfrm>
           <a:prstGeom prst="rect">
@@ -6785,7 +6808,7 @@
       </p:sp>
       <p:pic>
         <p:nvPicPr>
-          <p:cNvPr id="5" name="8de9aa7b0e58010a491d155d2a0aaafbe5d48c9d4da5759fad5af686b3fce993" descr="Knowing when to stop"/>
+          <p:cNvPr id="5" name="8de9aa7b0e58010a491d155d2a0aaafbe5d48c9d4da5759fad5af686b3fce993" descr="Kingman: queue wait vs reviewer utilization, variability factor one"/>
           <p:cNvPicPr>
             <a:picLocks noChangeAspect="1"/>
           </p:cNvPicPr>
